--- a/GoFAA0_Construccion/GoFAA00A_Plantillas_Basicas/0000B-EN0AA-000-000-TXT-000-000-SO_aux_presentacionDiapositivas_es-WF-2600.pptx
+++ b/GoFAA0_Construccion/GoFAA00A_Plantillas_Basicas/0000B-EN0AA-000-000-TXT-000-000-SO_aux_presentacionDiapositivas_es-WF-2600.pptx
@@ -310,6 +310,11 @@
       </a:defRPr>
     </a:lvl9pPr>
   </p:defaultTextStyle>
+  <p:extLst>
+    <p:ext uri="{EFAFB233-063F-42B5-8137-9DF3F51BA10A}">
+      <p15:sldGuideLst xmlns:p15="http://schemas.microsoft.com/office/powerpoint/2012/main"/>
+    </p:ext>
+  </p:extLst>
 </p:presentation>
 </file>
 
@@ -1128,7 +1133,7 @@
           </a:ln>
           <a:extLst>
             <a:ext uri="{C572A759-6A51-4108-AA02-DFA0A04FC94B}">
-              <ma14:wrappingTextBoxFlag xmlns:ma14="http://schemas.microsoft.com/office/mac/drawingml/2011/main" xmlns:a14="http://schemas.microsoft.com/office/drawing/2010/main" xmlns:m="http://schemas.openxmlformats.org/officeDocument/2006/math" xmlns="" val="1"/>
+              <ma14:wrappingTextBoxFlag xmlns="" xmlns:m="http://schemas.openxmlformats.org/officeDocument/2006/math" xmlns:a14="http://schemas.microsoft.com/office/drawing/2010/main" xmlns:ma14="http://schemas.microsoft.com/office/mac/drawingml/2011/main" val="1"/>
             </a:ext>
           </a:extLst>
         </p:spPr>
@@ -2043,7 +2048,7 @@
           </a:ln>
           <a:extLst>
             <a:ext uri="{C572A759-6A51-4108-AA02-DFA0A04FC94B}">
-              <ma14:wrappingTextBoxFlag xmlns:ma14="http://schemas.microsoft.com/office/mac/drawingml/2011/main" xmlns:a14="http://schemas.microsoft.com/office/drawing/2010/main" xmlns:m="http://schemas.openxmlformats.org/officeDocument/2006/math" xmlns="" val="1"/>
+              <ma14:wrappingTextBoxFlag xmlns="" xmlns:m="http://schemas.openxmlformats.org/officeDocument/2006/math" xmlns:a14="http://schemas.microsoft.com/office/drawing/2010/main" xmlns:ma14="http://schemas.microsoft.com/office/mac/drawingml/2011/main" val="1"/>
             </a:ext>
           </a:extLst>
         </p:spPr>
@@ -2958,7 +2963,7 @@
           </a:ln>
           <a:extLst>
             <a:ext uri="{C572A759-6A51-4108-AA02-DFA0A04FC94B}">
-              <ma14:wrappingTextBoxFlag xmlns:ma14="http://schemas.microsoft.com/office/mac/drawingml/2011/main" xmlns:a14="http://schemas.microsoft.com/office/drawing/2010/main" xmlns:m="http://schemas.openxmlformats.org/officeDocument/2006/math" xmlns="" val="1"/>
+              <ma14:wrappingTextBoxFlag xmlns="" xmlns:m="http://schemas.openxmlformats.org/officeDocument/2006/math" xmlns:a14="http://schemas.microsoft.com/office/drawing/2010/main" xmlns:ma14="http://schemas.microsoft.com/office/mac/drawingml/2011/main" val="1"/>
             </a:ext>
           </a:extLst>
         </p:spPr>
@@ -3876,7 +3881,7 @@
           </a:ln>
           <a:extLst>
             <a:ext uri="{C572A759-6A51-4108-AA02-DFA0A04FC94B}">
-              <ma14:wrappingTextBoxFlag xmlns:ma14="http://schemas.microsoft.com/office/mac/drawingml/2011/main" xmlns:a14="http://schemas.microsoft.com/office/drawing/2010/main" xmlns:m="http://schemas.openxmlformats.org/officeDocument/2006/math" xmlns="" val="1"/>
+              <ma14:wrappingTextBoxFlag xmlns="" xmlns:m="http://schemas.openxmlformats.org/officeDocument/2006/math" xmlns:a14="http://schemas.microsoft.com/office/drawing/2010/main" xmlns:ma14="http://schemas.microsoft.com/office/mac/drawingml/2011/main" val="1"/>
             </a:ext>
           </a:extLst>
         </p:spPr>
@@ -4619,7 +4624,7 @@
           </a:ln>
           <a:extLst>
             <a:ext uri="{C572A759-6A51-4108-AA02-DFA0A04FC94B}">
-              <ma14:wrappingTextBoxFlag xmlns:ma14="http://schemas.microsoft.com/office/mac/drawingml/2011/main" xmlns:a14="http://schemas.microsoft.com/office/drawing/2010/main" xmlns:m="http://schemas.openxmlformats.org/officeDocument/2006/math" xmlns="" val="1"/>
+              <ma14:wrappingTextBoxFlag xmlns="" xmlns:m="http://schemas.openxmlformats.org/officeDocument/2006/math" xmlns:a14="http://schemas.microsoft.com/office/drawing/2010/main" xmlns:ma14="http://schemas.microsoft.com/office/mac/drawingml/2011/main" val="1"/>
             </a:ext>
           </a:extLst>
         </p:spPr>
@@ -5364,7 +5369,7 @@
           </a:ln>
           <a:extLst>
             <a:ext uri="{C572A759-6A51-4108-AA02-DFA0A04FC94B}">
-              <ma14:wrappingTextBoxFlag xmlns:ma14="http://schemas.microsoft.com/office/mac/drawingml/2011/main" xmlns:a14="http://schemas.microsoft.com/office/drawing/2010/main" xmlns:m="http://schemas.openxmlformats.org/officeDocument/2006/math" xmlns="" val="1"/>
+              <ma14:wrappingTextBoxFlag xmlns="" xmlns:m="http://schemas.openxmlformats.org/officeDocument/2006/math" xmlns:a14="http://schemas.microsoft.com/office/drawing/2010/main" xmlns:ma14="http://schemas.microsoft.com/office/mac/drawingml/2011/main" val="1"/>
             </a:ext>
           </a:extLst>
         </p:spPr>
@@ -6114,7 +6119,7 @@
           </a:ln>
           <a:extLst>
             <a:ext uri="{C572A759-6A51-4108-AA02-DFA0A04FC94B}">
-              <ma14:wrappingTextBoxFlag xmlns:ma14="http://schemas.microsoft.com/office/mac/drawingml/2011/main" xmlns:a14="http://schemas.microsoft.com/office/drawing/2010/main" xmlns:m="http://schemas.openxmlformats.org/officeDocument/2006/math" xmlns="" val="1"/>
+              <ma14:wrappingTextBoxFlag xmlns="" xmlns:m="http://schemas.openxmlformats.org/officeDocument/2006/math" xmlns:a14="http://schemas.microsoft.com/office/drawing/2010/main" xmlns:ma14="http://schemas.microsoft.com/office/mac/drawingml/2011/main" val="1"/>
             </a:ext>
           </a:extLst>
         </p:spPr>
@@ -6761,7 +6766,7 @@
           </a:ln>
           <a:extLst>
             <a:ext uri="{C572A759-6A51-4108-AA02-DFA0A04FC94B}">
-              <ma14:wrappingTextBoxFlag xmlns:ma14="http://schemas.microsoft.com/office/mac/drawingml/2011/main" xmlns:a14="http://schemas.microsoft.com/office/drawing/2010/main" xmlns:m="http://schemas.openxmlformats.org/officeDocument/2006/math" xmlns="" val="1"/>
+              <ma14:wrappingTextBoxFlag xmlns="" xmlns:m="http://schemas.openxmlformats.org/officeDocument/2006/math" xmlns:a14="http://schemas.microsoft.com/office/drawing/2010/main" xmlns:ma14="http://schemas.microsoft.com/office/mac/drawingml/2011/main" val="1"/>
             </a:ext>
           </a:extLst>
         </p:spPr>
@@ -7435,7 +7440,7 @@
           </a:ln>
           <a:extLst>
             <a:ext uri="{C572A759-6A51-4108-AA02-DFA0A04FC94B}">
-              <ma14:wrappingTextBoxFlag xmlns:ma14="http://schemas.microsoft.com/office/mac/drawingml/2011/main" xmlns:a14="http://schemas.microsoft.com/office/drawing/2010/main" xmlns:m="http://schemas.openxmlformats.org/officeDocument/2006/math" xmlns="" val="1"/>
+              <ma14:wrappingTextBoxFlag xmlns="" xmlns:m="http://schemas.openxmlformats.org/officeDocument/2006/math" xmlns:a14="http://schemas.microsoft.com/office/drawing/2010/main" xmlns:ma14="http://schemas.microsoft.com/office/mac/drawingml/2011/main" val="1"/>
             </a:ext>
           </a:extLst>
         </p:spPr>
@@ -8250,7 +8255,7 @@
           </a:ln>
           <a:extLst>
             <a:ext uri="{C572A759-6A51-4108-AA02-DFA0A04FC94B}">
-              <ma14:wrappingTextBoxFlag xmlns:ma14="http://schemas.microsoft.com/office/mac/drawingml/2011/main" xmlns:a14="http://schemas.microsoft.com/office/drawing/2010/main" xmlns:m="http://schemas.openxmlformats.org/officeDocument/2006/math" xmlns="" val="1"/>
+              <ma14:wrappingTextBoxFlag xmlns="" xmlns:m="http://schemas.openxmlformats.org/officeDocument/2006/math" xmlns:a14="http://schemas.microsoft.com/office/drawing/2010/main" xmlns:ma14="http://schemas.microsoft.com/office/mac/drawingml/2011/main" val="1"/>
             </a:ext>
           </a:extLst>
         </p:spPr>
@@ -8792,7 +8797,7 @@
           </a:ln>
           <a:extLst>
             <a:ext uri="{C572A759-6A51-4108-AA02-DFA0A04FC94B}">
-              <ma14:wrappingTextBoxFlag xmlns:ma14="http://schemas.microsoft.com/office/mac/drawingml/2011/main" xmlns:a14="http://schemas.microsoft.com/office/drawing/2010/main" xmlns:m="http://schemas.openxmlformats.org/officeDocument/2006/math" xmlns="" val="1"/>
+              <ma14:wrappingTextBoxFlag xmlns="" xmlns:m="http://schemas.openxmlformats.org/officeDocument/2006/math" xmlns:a14="http://schemas.microsoft.com/office/drawing/2010/main" xmlns:ma14="http://schemas.microsoft.com/office/mac/drawingml/2011/main" val="1"/>
             </a:ext>
           </a:extLst>
         </p:spPr>
@@ -9357,7 +9362,7 @@
           </a:ln>
           <a:extLst>
             <a:ext uri="{C572A759-6A51-4108-AA02-DFA0A04FC94B}">
-              <ma14:wrappingTextBoxFlag xmlns:ma14="http://schemas.microsoft.com/office/mac/drawingml/2011/main" xmlns:a14="http://schemas.microsoft.com/office/drawing/2010/main" xmlns:m="http://schemas.openxmlformats.org/officeDocument/2006/math" xmlns="" val="1"/>
+              <ma14:wrappingTextBoxFlag xmlns="" xmlns:m="http://schemas.openxmlformats.org/officeDocument/2006/math" xmlns:a14="http://schemas.microsoft.com/office/drawing/2010/main" xmlns:ma14="http://schemas.microsoft.com/office/mac/drawingml/2011/main" val="1"/>
             </a:ext>
           </a:extLst>
         </p:spPr>
@@ -9407,7 +9412,7 @@
           </a:effectLst>
           <a:extLst>
             <a:ext uri="{C572A759-6A51-4108-AA02-DFA0A04FC94B}">
-              <ma14:wrappingTextBoxFlag xmlns:ma14="http://schemas.microsoft.com/office/mac/drawingml/2011/main" xmlns:a14="http://schemas.microsoft.com/office/drawing/2010/main" xmlns:m="http://schemas.openxmlformats.org/officeDocument/2006/math" xmlns="" val="1"/>
+              <ma14:wrappingTextBoxFlag xmlns="" xmlns:m="http://schemas.openxmlformats.org/officeDocument/2006/math" xmlns:a14="http://schemas.microsoft.com/office/drawing/2010/main" xmlns:ma14="http://schemas.microsoft.com/office/mac/drawingml/2011/main" val="1"/>
             </a:ext>
           </a:extLst>
         </p:spPr>
@@ -9444,7 +9449,7 @@
           </a:ln>
           <a:extLst>
             <a:ext uri="{C572A759-6A51-4108-AA02-DFA0A04FC94B}">
-              <ma14:wrappingTextBoxFlag xmlns:ma14="http://schemas.microsoft.com/office/mac/drawingml/2011/main" xmlns:a14="http://schemas.microsoft.com/office/drawing/2010/main" xmlns:m="http://schemas.openxmlformats.org/officeDocument/2006/math" xmlns="" val="1"/>
+              <ma14:wrappingTextBoxFlag xmlns="" xmlns:m="http://schemas.openxmlformats.org/officeDocument/2006/math" xmlns:a14="http://schemas.microsoft.com/office/drawing/2010/main" xmlns:ma14="http://schemas.microsoft.com/office/mac/drawingml/2011/main" val="1"/>
             </a:ext>
           </a:extLst>
         </p:spPr>
@@ -10361,7 +10366,7 @@
           </a:prstGeom>
           <a:extLst>
             <a:ext uri="{C572A759-6A51-4108-AA02-DFA0A04FC94B}">
-              <ma14:wrappingTextBoxFlag xmlns:ma14="http://schemas.microsoft.com/office/mac/drawingml/2011/main" xmlns:a14="http://schemas.microsoft.com/office/drawing/2010/main" xmlns:m="http://schemas.openxmlformats.org/officeDocument/2006/math" xmlns="" val="1"/>
+              <ma14:wrappingTextBoxFlag xmlns="" xmlns:m="http://schemas.openxmlformats.org/officeDocument/2006/math" xmlns:a14="http://schemas.microsoft.com/office/drawing/2010/main" xmlns:ma14="http://schemas.microsoft.com/office/mac/drawingml/2011/main" val="1"/>
             </a:ext>
           </a:extLst>
         </p:spPr>
@@ -10435,7 +10440,7 @@
 <file path=ppt/theme/theme1.xml><?xml version="1.0" encoding="utf-8"?>
 <a:theme xmlns:a="http://schemas.openxmlformats.org/drawingml/2006/main" name="CTDi-Org">
   <a:themeElements>
-    <a:clrScheme name="CTDi Pro Colors">
+    <a:clrScheme name="CTDi_Pro_Colors_26">
       <a:dk1>
         <a:srgbClr val="000000"/>
       </a:dk1>
@@ -10443,34 +10448,34 @@
         <a:srgbClr val="FFFFFF"/>
       </a:lt1>
       <a:dk2>
-        <a:srgbClr val="A7A7A7"/>
+        <a:srgbClr val="555555"/>
       </a:dk2>
       <a:lt2>
-        <a:srgbClr val="535353"/>
+        <a:srgbClr val="AAAAAA"/>
       </a:lt2>
       <a:accent1>
-        <a:srgbClr val="C31900"/>
+        <a:srgbClr val="C60D00"/>
       </a:accent1>
       <a:accent2>
-        <a:srgbClr val="FF6300"/>
+        <a:srgbClr val="FE5400"/>
       </a:accent2>
       <a:accent3>
-        <a:srgbClr val="FFA643"/>
+        <a:srgbClr val="FEAA1C"/>
       </a:accent3>
       <a:accent4>
-        <a:srgbClr val="00416F"/>
+        <a:srgbClr val="00548E"/>
       </a:accent4>
       <a:accent5>
-        <a:srgbClr val="0096FF"/>
+        <a:srgbClr val="008DFF"/>
       </a:accent5>
       <a:accent6>
-        <a:srgbClr val="6FD7FF"/>
+        <a:srgbClr val="71C6FE"/>
       </a:accent6>
       <a:hlink>
-        <a:srgbClr val="0043D3"/>
+        <a:srgbClr val="1C5571"/>
       </a:hlink>
       <a:folHlink>
-        <a:srgbClr val="637DA6"/>
+        <a:srgbClr val="5571AA"/>
       </a:folHlink>
     </a:clrScheme>
     <a:fontScheme name="CTDi-Org">
